--- a/lecons/USA/Practical Geography/01_USA_PRA_MA01_Review_of_Map_Reading_Principles.pptx
+++ b/lecons/USA/Practical Geography/01_USA_PRA_MA01_Review_of_Map_Reading_Principles.pptx
@@ -13866,7 +13866,7 @@
               <a:buNone/>
             </a:pPr>
             <a:r>
-              <a:rPr lang="en-US" sz="4000" b="1" dirty="0">
+              <a:rPr lang="en-US" sz="3200" b="1" dirty="0">
                 <a:solidFill>
                   <a:srgbClr val="111111"/>
                 </a:solidFill>
@@ -13876,7 +13876,7 @@
               </a:rPr>
               <a:t>Topic: Topographic Map Analysis</a:t>
             </a:r>
-            <a:endParaRPr lang="en-US" sz="4000" dirty="0"/>
+            <a:endParaRPr lang="en-US" sz="3200" dirty="0"/>
           </a:p>
           <a:p>
             <a:pPr algn="l" indent="0" marL="0">
@@ -13886,7 +13886,7 @@
               <a:buNone/>
             </a:pPr>
             <a:r>
-              <a:rPr lang="en-US" sz="4000" b="1" dirty="0">
+              <a:rPr lang="en-US" sz="3200" b="1" dirty="0">
                 <a:solidFill>
                   <a:srgbClr val="111111"/>
                 </a:solidFill>
@@ -13896,7 +13896,7 @@
               </a:rPr>
               <a:t>Sub-topic: Review of map reading of the first cycle</a:t>
             </a:r>
-            <a:endParaRPr lang="en-US" sz="4000" dirty="0"/>
+            <a:endParaRPr lang="en-US" sz="3200" dirty="0"/>
           </a:p>
           <a:p>
             <a:pPr algn="l" indent="0" marL="0">
@@ -13906,7 +13906,7 @@
               <a:buNone/>
             </a:pPr>
             <a:r>
-              <a:rPr lang="en-US" sz="4000" b="1" dirty="0">
+              <a:rPr lang="en-US" sz="3200" b="1" dirty="0">
                 <a:solidFill>
                   <a:srgbClr val="990011"/>
                 </a:solidFill>
@@ -13916,7 +13916,7 @@
               </a:rPr>
               <a:t>Map Analysis 1: Review of Map Reading Principles</a:t>
             </a:r>
-            <a:endParaRPr lang="en-US" sz="4000" dirty="0"/>
+            <a:endParaRPr lang="en-US" sz="3200" dirty="0"/>
           </a:p>
         </p:txBody>
       </p:sp>

--- a/lecons/USA/Practical Geography/01_USA_PRA_MA01_Review_of_Map_Reading_Principles.pptx
+++ b/lecons/USA/Practical Geography/01_USA_PRA_MA01_Review_of_Map_Reading_Principles.pptx
@@ -3463,7 +3463,7 @@
           <a:p>
             <a:r>
               <a:rPr lang="en-US" dirty="0"/>
-              <a:t>Before we start the new lesson, let us correct the homework I gave you at the end of Further Study 1: Contrast in Development within Cameroon. The question was: Compare your region with Douala using three indicators and suggest two projects. Take out your exercise books.</a:t>
+              <a:t>Before we start the new lesson, let us correct the homework I gave you at the end of Lesson 14: Aid and Interdependence. The question was: List five conventional signs used on topographic maps. Take out your exercise books.</a:t>
             </a:r>
             <a:endParaRPr lang="en-US" dirty="0"/>
           </a:p>
@@ -4431,7 +4431,7 @@
           <a:p>
             <a:r>
               <a:rPr lang="en-US" dirty="0"/>
-              <a:t>Here is a good answer. Example (North vs Douala): literacy about 40 % vs 90 %; electricity access about 30 % vs 90 %; industrial jobs few vs many. Projects: tar the rural roads and build a vocational training centre. Compare it with your own answer and correct your work in red.</a:t>
+              <a:t>Here is a good answer. Examples: roads, railways, rivers, contours, settlements, churches, schools, spot heights (any five). Compare it with your own answer and correct your work in red.</a:t>
             </a:r>
             <a:endParaRPr lang="en-US" dirty="0"/>
           </a:p>
@@ -15331,7 +15331,7 @@
                 <a:ea typeface="Times New Roman" pitchFamily="34" charset="-122"/>
                 <a:cs typeface="Times New Roman" pitchFamily="34" charset="-120"/>
               </a:rPr>
-              <a:t>Question (Further Study 1: Contrast in Development within Cameroon):</a:t>
+              <a:t>Question (Lesson 14: Aid and Interdependence):</a:t>
             </a:r>
             <a:endParaRPr lang="en-US" sz="4000" dirty="0"/>
           </a:p>
@@ -15351,7 +15351,7 @@
                 <a:ea typeface="Times New Roman" pitchFamily="34" charset="-122"/>
                 <a:cs typeface="Times New Roman" pitchFamily="34" charset="-120"/>
               </a:rPr>
-              <a:t>Compare your region with Douala using three indicators and suggest two projects.</a:t>
+              <a:t>List five conventional signs used on topographic maps.</a:t>
             </a:r>
             <a:endParaRPr lang="en-US" sz="4000" dirty="0"/>
           </a:p>
@@ -17875,7 +17875,7 @@
                 <a:ea typeface="Times New Roman" pitchFamily="34" charset="-122"/>
                 <a:cs typeface="Times New Roman" pitchFamily="34" charset="-120"/>
               </a:rPr>
-              <a:t>Example (North vs Douala): literacy about 40 % vs 90 %; electricity access about 30 % vs 90 %; industrial jobs few vs many. Projects: tar the rural roads and build a vocational training centre.</a:t>
+              <a:t>Examples: roads, railways, rivers, contours, settlements, churches, schools, spot heights (any five).</a:t>
             </a:r>
             <a:endParaRPr lang="en-US" sz="4000" dirty="0"/>
           </a:p>
